--- a/decks/englit-macbeth/englit-macbeth_ch5_tyranny-and-kingship.pptx
+++ b/decks/englit-macbeth/englit-macbeth_ch5_tyranny-and-kingship.pptx
@@ -125,37 +125,37 @@
   <p:extLst>
     <p:ext uri="{521415D9-36F7-43E2-AB2F-B90AF26B5E84}">
       <p14:sectionLst xmlns:p14="http://schemas.microsoft.com/office/powerpoint/2010/main">
-        <p14:section name="Opening" id="{c07e8635-906c-17bd-fa80-6c1786b40238}">
+        <p14:section name="Opening" id="{4ad57947-a9fe-2d32-9f23-01ed79219c77}">
           <p14:sldIdLst>
             <p14:sldId id="256"/>
           </p14:sldIdLst>
         </p14:section>
-        <p14:section name="Gate" id="{adb7fe97-a083-a7e7-aaa8-321e9c0b7199}">
+        <p14:section name="Gate" id="{dd54c498-b51e-f634-104b-a4fd45177129}">
           <p14:sldIdLst>
             <p14:sldId id="257"/>
             <p14:sldId id="258"/>
           </p14:sldIdLst>
         </p14:section>
-        <p14:section name="Pre-teach" id="{f944f53d-c98c-5ba6-0bdb-6e958cc3efc8}">
+        <p14:section name="Pre-teach" id="{eba06761-bb1b-4483-f038-11c4c12afcd1}">
           <p14:sldIdLst>
             <p14:sldId id="259"/>
             <p14:sldId id="260"/>
           </p14:sldIdLst>
         </p14:section>
-        <p14:section name="Read-along" id="{f5b3761f-58a0-76d5-0624-e9c631caefc9}">
+        <p14:section name="Read-along" id="{6872d9c3-35d6-5c09-f74f-da5e6f894462}">
           <p14:sldIdLst>
             <p14:sldId id="261"/>
             <p14:sldId id="262"/>
           </p14:sldIdLst>
         </p14:section>
-        <p14:section name="Teach" id="{3760244f-d749-e3cf-0ef3-e1a327776b97}">
+        <p14:section name="Teach" id="{b65b3ca4-af1b-75b1-244e-f950dca013b3}">
           <p14:sldIdLst>
             <p14:sldId id="263"/>
             <p14:sldId id="264"/>
             <p14:sldId id="265"/>
           </p14:sldIdLst>
         </p14:section>
-        <p14:section name="Routes" id="{5cc219fb-d5fc-8789-fbfd-e6d9fdd5d534}">
+        <p14:section name="Routes" id="{080bea2c-a361-f5e7-69c7-0edbaa074722}">
           <p14:sldIdLst>
             <p14:sldId id="266"/>
             <p14:sldId id="267"/>
@@ -163,12 +163,12 @@
             <p14:sldId id="269"/>
           </p14:sldIdLst>
         </p14:section>
-        <p14:section name="Close" id="{26883fd5-89a4-4bdc-51a2-fa2413100820}">
+        <p14:section name="Close" id="{6ba9b777-32f1-c249-aa59-b5dd54d365da}">
           <p14:sldIdLst>
             <p14:sldId id="270"/>
           </p14:sldIdLst>
         </p14:section>
-        <p14:section name="Answers" id="{931d1cc8-f9a5-213a-55e0-767f8eecb9a1}">
+        <p14:section name="Answers" id="{e40f5832-dd2c-bc75-92ee-423d0f128b45}">
           <p14:sldIdLst>
             <p14:sldId id="271"/>
             <p14:sldId id="272"/>
